--- a/永豐銀行-AP架構審議雲適性評估_v1.0.pptx
+++ b/永豐銀行-AP架構審議雲適性評估_v1.0.pptx
@@ -2,18 +2,18 @@
 <file path=ppt/presentation.xml><?xml version="1.0" encoding="utf-8"?>
 <p:presentation xmlns:a="http://schemas.openxmlformats.org/drawingml/2006/main" xmlns:r="http://schemas.openxmlformats.org/officeDocument/2006/relationships" xmlns:p="http://schemas.openxmlformats.org/presentationml/2006/main" saveSubsetFonts="1">
   <p:sldMasterIdLst>
-    <p:sldMasterId id="2147484291" r:id="rId2"/>
-    <p:sldMasterId id="2147484433" r:id="rId3"/>
+    <p:sldMasterId id="2147484291" r:id="rId5"/>
+    <p:sldMasterId id="2147484433" r:id="rId6"/>
   </p:sldMasterIdLst>
   <p:notesMasterIdLst>
-    <p:notesMasterId r:id="rId6"/>
+    <p:notesMasterId r:id="rId9"/>
   </p:notesMasterIdLst>
   <p:handoutMasterIdLst>
-    <p:handoutMasterId r:id="rId7"/>
+    <p:handoutMasterId r:id="rId10"/>
   </p:handoutMasterIdLst>
   <p:sldIdLst>
-    <p:sldId id="3274" r:id="rId4"/>
-    <p:sldId id="3275" r:id="rId5"/>
+    <p:sldId id="3274" r:id="rId7"/>
+    <p:sldId id="3275" r:id="rId8"/>
   </p:sldIdLst>
   <p:sldSz cx="12190413" cy="6858000"/>
   <p:notesSz cx="9926638" cy="6797675"/>
@@ -206,6 +206,43 @@
 </p:presentation>
 </file>
 
+<file path=ppt/revisionInfo.xml><?xml version="1.0" encoding="utf-8"?>
+<p1510:revInfo xmlns:a="http://schemas.openxmlformats.org/drawingml/2006/main" xmlns:r="http://schemas.openxmlformats.org/officeDocument/2006/relationships" xmlns:p1510="http://schemas.microsoft.com/office/powerpoint/2015/10/main">
+  <p1510:revLst>
+    <p1510:client id="{5DC357F9-BC74-4DA8-BF52-4C3483E925D7}" v="64" dt="2026-06-26T02:25:14.797"/>
+  </p1510:revLst>
+</p1510:revInfo>
+</file>
+
+<file path=ppt/changesInfos/changesInfo1.xml><?xml version="1.0" encoding="utf-8"?>
+<pc:chgInfo xmlns:a="http://schemas.openxmlformats.org/drawingml/2006/main" xmlns:r="http://schemas.openxmlformats.org/officeDocument/2006/relationships" xmlns:ac="http://schemas.microsoft.com/office/drawing/2013/main/command" xmlns:pc="http://schemas.microsoft.com/office/powerpoint/2013/main/command">
+  <pc:docChgLst>
+    <pc:chgData name="王雋凱-數位金融處-永豐銀行" userId="f78494d6-bac0-4c9e-94cd-0b5e029c0856" providerId="ADAL" clId="{5DC357F9-BC74-4DA8-BF52-4C3483E925D7}"/>
+    <pc:docChg chg="undo custSel modSld">
+      <pc:chgData name="王雋凱-數位金融處-永豐銀行" userId="f78494d6-bac0-4c9e-94cd-0b5e029c0856" providerId="ADAL" clId="{5DC357F9-BC74-4DA8-BF52-4C3483E925D7}" dt="2026-06-26T02:25:45.855" v="306" actId="20577"/>
+      <pc:docMkLst>
+        <pc:docMk/>
+      </pc:docMkLst>
+      <pc:sldChg chg="modSp mod">
+        <pc:chgData name="王雋凱-數位金融處-永豐銀行" userId="f78494d6-bac0-4c9e-94cd-0b5e029c0856" providerId="ADAL" clId="{5DC357F9-BC74-4DA8-BF52-4C3483E925D7}" dt="2026-06-26T02:25:45.855" v="306" actId="20577"/>
+        <pc:sldMkLst>
+          <pc:docMk/>
+          <pc:sldMk cId="3463483703" sldId="3274"/>
+        </pc:sldMkLst>
+        <pc:graphicFrameChg chg="mod modGraphic">
+          <ac:chgData name="王雋凱-數位金融處-永豐銀行" userId="f78494d6-bac0-4c9e-94cd-0b5e029c0856" providerId="ADAL" clId="{5DC357F9-BC74-4DA8-BF52-4C3483E925D7}" dt="2026-06-26T02:25:45.855" v="306" actId="20577"/>
+          <ac:graphicFrameMkLst>
+            <pc:docMk/>
+            <pc:sldMk cId="3463483703" sldId="3274"/>
+            <ac:graphicFrameMk id="5" creationId="{4AA8387D-2FB4-6978-F7F3-A9ECA5A23BB7}"/>
+          </ac:graphicFrameMkLst>
+        </pc:graphicFrameChg>
+      </pc:sldChg>
+    </pc:docChg>
+  </pc:docChgLst>
+</pc:chgInfo>
+</file>
+
 <file path=ppt/handoutMasters/handoutMaster1.xml><?xml version="1.0" encoding="utf-8"?>
 <p:handoutMaster xmlns:a="http://schemas.openxmlformats.org/drawingml/2006/main" xmlns:r="http://schemas.openxmlformats.org/officeDocument/2006/relationships" xmlns:p="http://schemas.openxmlformats.org/presentationml/2006/main">
   <p:cSld>
@@ -318,7 +355,7 @@
               <a:pPr>
                 <a:defRPr/>
               </a:pPr>
-              <a:t>2026/6/22</a:t>
+              <a:t>2026/6/26</a:t>
             </a:fld>
             <a:endParaRPr lang="zh-TW" altLang="en-US"/>
           </a:p>
@@ -540,7 +577,7 @@
               <a:pPr>
                 <a:defRPr/>
               </a:pPr>
-              <a:t>2026/6/22</a:t>
+              <a:t>2026/6/26</a:t>
             </a:fld>
             <a:endParaRPr lang="zh-TW" altLang="en-US"/>
           </a:p>
@@ -6481,7 +6518,7 @@
             <a:fld id="{5BBEAD13-0566-4C6C-97E7-55F17F24B09F}" type="datetimeFigureOut">
               <a:rPr lang="zh-TW" altLang="en-US" smtClean="0"/>
               <a:pPr/>
-              <a:t>2026/6/22</a:t>
+              <a:t>2026/6/26</a:t>
             </a:fld>
             <a:endParaRPr lang="zh-TW" altLang="en-US"/>
           </a:p>
@@ -10455,14 +10492,14 @@
           <p:nvPr>
             <p:extLst>
               <p:ext uri="{D42A27DB-BD31-4B8C-83A1-F6EECF244321}">
-                <p14:modId xmlns:p14="http://schemas.microsoft.com/office/powerpoint/2010/main" val="3243650682"/>
+                <p14:modId xmlns:p14="http://schemas.microsoft.com/office/powerpoint/2010/main" val="738892485"/>
               </p:ext>
             </p:extLst>
           </p:nvPr>
         </p:nvGraphicFramePr>
         <p:xfrm>
           <a:off x="190550" y="3645024"/>
-          <a:ext cx="11881320" cy="2818782"/>
+          <a:ext cx="11881320" cy="2971182"/>
         </p:xfrm>
         <a:graphic>
           <a:graphicData uri="http://schemas.openxmlformats.org/drawingml/2006/table">
@@ -11624,7 +11661,7 @@
                     <a:p>
                       <a:pPr algn="ctr" fontAlgn="ctr"/>
                       <a:r>
-                        <a:rPr lang="zh-TW" altLang="en-US" sz="1200" b="1" i="0" u="none" strike="noStrike">
+                        <a:rPr lang="zh-TW" altLang="en-US" sz="1200" b="1" i="0" u="none" strike="noStrike" dirty="0">
                           <a:solidFill>
                             <a:srgbClr val="000000"/>
                           </a:solidFill>
@@ -11918,14 +11955,226 @@
                     <a:lstStyle/>
                     <a:p>
                       <a:pPr algn="ctr" fontAlgn="ctr"/>
-                      <a:endParaRPr lang="zh-TW" altLang="en-US" sz="1000" b="1" i="0" u="none" strike="noStrike" dirty="0">
-                        <a:solidFill>
-                          <a:srgbClr val="000000"/>
-                        </a:solidFill>
-                        <a:effectLst/>
-                        <a:latin typeface="微軟正黑體" panose="020B0604030504040204" pitchFamily="34" charset="-120"/>
-                        <a:ea typeface="微軟正黑體" panose="020B0604030504040204" pitchFamily="34" charset="-120"/>
-                      </a:endParaRPr>
+                      <a:r>
+                        <a:rPr lang="zh-TW" altLang="en-US" sz="1000" b="0" i="0" u="none" strike="noStrike" dirty="0">
+                          <a:solidFill>
+                            <a:srgbClr val="000000"/>
+                          </a:solidFill>
+                          <a:effectLst/>
+                          <a:latin typeface="微軟正黑體" panose="020B0604030504040204" pitchFamily="34" charset="-120"/>
+                          <a:ea typeface="微軟正黑體" panose="020B0604030504040204" pitchFamily="34" charset="-120"/>
+                        </a:rPr>
+                        <a:t>本系統為資料蒐集整合平台，包含 </a:t>
+                      </a:r>
+                      <a:r>
+                        <a:rPr lang="en-US" altLang="zh-TW" sz="1000" b="0" i="0" u="none" strike="noStrike" dirty="0">
+                          <a:solidFill>
+                            <a:srgbClr val="000000"/>
+                          </a:solidFill>
+                          <a:effectLst/>
+                          <a:latin typeface="微軟正黑體" panose="020B0604030504040204" pitchFamily="34" charset="-120"/>
+                          <a:ea typeface="微軟正黑體" panose="020B0604030504040204" pitchFamily="34" charset="-120"/>
+                        </a:rPr>
+                        <a:t>Angular </a:t>
+                      </a:r>
+                      <a:r>
+                        <a:rPr lang="zh-TW" altLang="en-US" sz="1000" b="0" i="0" u="none" strike="noStrike" dirty="0">
+                          <a:solidFill>
+                            <a:srgbClr val="000000"/>
+                          </a:solidFill>
+                          <a:effectLst/>
+                          <a:latin typeface="微軟正黑體" panose="020B0604030504040204" pitchFamily="34" charset="-120"/>
+                          <a:ea typeface="微軟正黑體" panose="020B0604030504040204" pitchFamily="34" charset="-120"/>
+                        </a:rPr>
+                        <a:t>前端、 </a:t>
+                      </a:r>
+                      <a:r>
+                        <a:rPr lang="en-US" altLang="zh-TW" sz="1000" b="0" i="0" u="none" strike="noStrike" dirty="0" err="1">
+                          <a:solidFill>
+                            <a:srgbClr val="000000"/>
+                          </a:solidFill>
+                          <a:effectLst/>
+                          <a:latin typeface="微軟正黑體" panose="020B0604030504040204" pitchFamily="34" charset="-120"/>
+                          <a:ea typeface="微軟正黑體" panose="020B0604030504040204" pitchFamily="34" charset="-120"/>
+                        </a:rPr>
+                        <a:t>NestJS</a:t>
+                      </a:r>
+                      <a:r>
+                        <a:rPr lang="en-US" altLang="zh-TW" sz="1000" b="0" i="0" u="none" strike="noStrike" dirty="0">
+                          <a:solidFill>
+                            <a:srgbClr val="000000"/>
+                          </a:solidFill>
+                          <a:effectLst/>
+                          <a:latin typeface="微軟正黑體" panose="020B0604030504040204" pitchFamily="34" charset="-120"/>
+                          <a:ea typeface="微軟正黑體" panose="020B0604030504040204" pitchFamily="34" charset="-120"/>
+                        </a:rPr>
+                        <a:t> API </a:t>
+                      </a:r>
+                      <a:r>
+                        <a:rPr lang="zh-TW" altLang="en-US" sz="1000" b="0" i="0" u="none" strike="noStrike" dirty="0">
+                          <a:solidFill>
+                            <a:srgbClr val="000000"/>
+                          </a:solidFill>
+                          <a:effectLst/>
+                          <a:latin typeface="微軟正黑體" panose="020B0604030504040204" pitchFamily="34" charset="-120"/>
+                          <a:ea typeface="微軟正黑體" panose="020B0604030504040204" pitchFamily="34" charset="-120"/>
+                        </a:rPr>
+                        <a:t>、 </a:t>
+                      </a:r>
+                      <a:r>
+                        <a:rPr lang="en-US" altLang="zh-TW" sz="1000" b="0" i="0" u="none" strike="noStrike" dirty="0">
+                          <a:solidFill>
+                            <a:srgbClr val="000000"/>
+                          </a:solidFill>
+                          <a:effectLst/>
+                          <a:latin typeface="微軟正黑體" panose="020B0604030504040204" pitchFamily="34" charset="-120"/>
+                          <a:ea typeface="微軟正黑體" panose="020B0604030504040204" pitchFamily="34" charset="-120"/>
+                        </a:rPr>
+                        <a:t>MongoDB </a:t>
+                      </a:r>
+                      <a:r>
+                        <a:rPr lang="zh-TW" altLang="en-US" sz="1000" b="0" i="0" u="none" strike="noStrike" dirty="0">
+                          <a:solidFill>
+                            <a:srgbClr val="000000"/>
+                          </a:solidFill>
+                          <a:effectLst/>
+                          <a:latin typeface="微軟正黑體" panose="020B0604030504040204" pitchFamily="34" charset="-120"/>
+                          <a:ea typeface="微軟正黑體" panose="020B0604030504040204" pitchFamily="34" charset="-120"/>
+                        </a:rPr>
+                        <a:t>、 </a:t>
+                      </a:r>
+                      <a:r>
+                        <a:rPr lang="en-US" altLang="zh-TW" sz="1000" b="0" i="0" u="none" strike="noStrike" dirty="0">
+                          <a:solidFill>
+                            <a:srgbClr val="000000"/>
+                          </a:solidFill>
+                          <a:effectLst/>
+                          <a:latin typeface="微軟正黑體" panose="020B0604030504040204" pitchFamily="34" charset="-120"/>
+                          <a:ea typeface="微軟正黑體" panose="020B0604030504040204" pitchFamily="34" charset="-120"/>
+                        </a:rPr>
+                        <a:t>Redis</a:t>
+                      </a:r>
+                      <a:r>
+                        <a:rPr lang="zh-TW" altLang="en-US" sz="1000" b="0" i="0" u="none" strike="noStrike" dirty="0">
+                          <a:solidFill>
+                            <a:srgbClr val="000000"/>
+                          </a:solidFill>
+                          <a:effectLst/>
+                          <a:latin typeface="微軟正黑體" panose="020B0604030504040204" pitchFamily="34" charset="-120"/>
+                          <a:ea typeface="微軟正黑體" panose="020B0604030504040204" pitchFamily="34" charset="-120"/>
+                        </a:rPr>
+                        <a:t>／</a:t>
+                      </a:r>
+                      <a:r>
+                        <a:rPr lang="en-US" altLang="zh-TW" sz="1000" b="0" i="0" u="none" strike="noStrike" dirty="0" err="1">
+                          <a:solidFill>
+                            <a:srgbClr val="000000"/>
+                          </a:solidFill>
+                          <a:effectLst/>
+                          <a:latin typeface="微軟正黑體" panose="020B0604030504040204" pitchFamily="34" charset="-120"/>
+                          <a:ea typeface="微軟正黑體" panose="020B0604030504040204" pitchFamily="34" charset="-120"/>
+                        </a:rPr>
+                        <a:t>BullMQ</a:t>
+                      </a:r>
+                      <a:r>
+                        <a:rPr lang="en-US" altLang="zh-TW" sz="1000" b="0" i="0" u="none" strike="noStrike" dirty="0">
+                          <a:solidFill>
+                            <a:srgbClr val="000000"/>
+                          </a:solidFill>
+                          <a:effectLst/>
+                          <a:latin typeface="微軟正黑體" panose="020B0604030504040204" pitchFamily="34" charset="-120"/>
+                          <a:ea typeface="微軟正黑體" panose="020B0604030504040204" pitchFamily="34" charset="-120"/>
+                        </a:rPr>
+                        <a:t> </a:t>
+                      </a:r>
+                      <a:r>
+                        <a:rPr lang="zh-TW" altLang="en-US" sz="1000" b="0" i="0" u="none" strike="noStrike" dirty="0">
+                          <a:solidFill>
+                            <a:srgbClr val="000000"/>
+                          </a:solidFill>
+                          <a:effectLst/>
+                          <a:latin typeface="微軟正黑體" panose="020B0604030504040204" pitchFamily="34" charset="-120"/>
+                          <a:ea typeface="微軟正黑體" panose="020B0604030504040204" pitchFamily="34" charset="-120"/>
+                        </a:rPr>
+                        <a:t>背景佇列，並串接 </a:t>
+                      </a:r>
+                      <a:r>
+                        <a:rPr lang="en-US" altLang="zh-TW" sz="1000" b="0" i="0" u="none" strike="noStrike" dirty="0">
+                          <a:solidFill>
+                            <a:srgbClr val="000000"/>
+                          </a:solidFill>
+                          <a:effectLst/>
+                          <a:latin typeface="微軟正黑體" panose="020B0604030504040204" pitchFamily="34" charset="-120"/>
+                          <a:ea typeface="微軟正黑體" panose="020B0604030504040204" pitchFamily="34" charset="-120"/>
+                        </a:rPr>
+                        <a:t>RSS </a:t>
+                      </a:r>
+                      <a:r>
+                        <a:rPr lang="zh-TW" altLang="en-US" sz="1000" b="0" i="0" u="none" strike="noStrike" dirty="0">
+                          <a:solidFill>
+                            <a:srgbClr val="000000"/>
+                          </a:solidFill>
+                          <a:effectLst/>
+                          <a:latin typeface="微軟正黑體" panose="020B0604030504040204" pitchFamily="34" charset="-120"/>
+                          <a:ea typeface="微軟正黑體" panose="020B0604030504040204" pitchFamily="34" charset="-120"/>
+                        </a:rPr>
+                        <a:t>、網頁搜尋服務、 </a:t>
+                      </a:r>
+                      <a:r>
+                        <a:rPr lang="en-US" altLang="zh-TW" sz="1000" b="0" i="0" u="none" strike="noStrike" dirty="0" err="1">
+                          <a:solidFill>
+                            <a:srgbClr val="000000"/>
+                          </a:solidFill>
+                          <a:effectLst/>
+                          <a:latin typeface="微軟正黑體" panose="020B0604030504040204" pitchFamily="34" charset="-120"/>
+                          <a:ea typeface="微軟正黑體" panose="020B0604030504040204" pitchFamily="34" charset="-120"/>
+                        </a:rPr>
+                        <a:t>Infominer</a:t>
+                      </a:r>
+                      <a:r>
+                        <a:rPr lang="en-US" altLang="zh-TW" sz="1000" b="0" i="0" u="none" strike="noStrike" dirty="0">
+                          <a:solidFill>
+                            <a:srgbClr val="000000"/>
+                          </a:solidFill>
+                          <a:effectLst/>
+                          <a:latin typeface="微軟正黑體" panose="020B0604030504040204" pitchFamily="34" charset="-120"/>
+                          <a:ea typeface="微軟正黑體" panose="020B0604030504040204" pitchFamily="34" charset="-120"/>
+                        </a:rPr>
+                        <a:t> </a:t>
+                      </a:r>
+                      <a:r>
+                        <a:rPr lang="zh-TW" altLang="en-US" sz="1000" b="0" i="0" u="none" strike="noStrike" dirty="0">
+                          <a:solidFill>
+                            <a:srgbClr val="000000"/>
+                          </a:solidFill>
+                          <a:effectLst/>
+                          <a:latin typeface="微軟正黑體" panose="020B0604030504040204" pitchFamily="34" charset="-120"/>
+                          <a:ea typeface="微軟正黑體" panose="020B0604030504040204" pitchFamily="34" charset="-120"/>
+                        </a:rPr>
+                        <a:t>與 </a:t>
+                      </a:r>
+                      <a:r>
+                        <a:rPr lang="en-US" altLang="zh-TW" sz="1000" b="0" i="0" u="none" strike="noStrike" dirty="0">
+                          <a:solidFill>
+                            <a:srgbClr val="000000"/>
+                          </a:solidFill>
+                          <a:effectLst/>
+                          <a:latin typeface="微軟正黑體" panose="020B0604030504040204" pitchFamily="34" charset="-120"/>
+                          <a:ea typeface="微軟正黑體" panose="020B0604030504040204" pitchFamily="34" charset="-120"/>
+                        </a:rPr>
+                        <a:t>OpenAI API </a:t>
+                      </a:r>
+                      <a:r>
+                        <a:rPr lang="zh-TW" altLang="en-US" sz="1000" b="0" i="0" u="none" strike="noStrike" dirty="0">
+                          <a:solidFill>
+                            <a:srgbClr val="000000"/>
+                          </a:solidFill>
+                          <a:effectLst/>
+                          <a:latin typeface="微軟正黑體" panose="020B0604030504040204" pitchFamily="34" charset="-120"/>
+                          <a:ea typeface="微軟正黑體" panose="020B0604030504040204" pitchFamily="34" charset="-120"/>
+                        </a:rPr>
+                        <a:t>等外部服務。</a:t>
+                      </a:r>
                     </a:p>
                   </a:txBody>
                   <a:tcPr marL="4874" marR="4874" marT="4874" marB="0" anchor="ctr">
@@ -11976,14 +12225,39 @@
                     <a:lstStyle/>
                     <a:p>
                       <a:pPr algn="ctr" fontAlgn="ctr"/>
-                      <a:endParaRPr lang="zh-TW" altLang="en-US" sz="1000" b="1" i="0" u="none" strike="noStrike" dirty="0">
-                        <a:solidFill>
-                          <a:srgbClr val="000000"/>
-                        </a:solidFill>
-                        <a:effectLst/>
-                        <a:latin typeface="微軟正黑體" panose="020B0604030504040204" pitchFamily="34" charset="-120"/>
-                        <a:ea typeface="微軟正黑體" panose="020B0604030504040204" pitchFamily="34" charset="-120"/>
-                      </a:endParaRPr>
+                      <a:r>
+                        <a:rPr lang="zh-TW" altLang="en-US" sz="1000" b="0" i="0" u="none" strike="noStrike" dirty="0">
+                          <a:solidFill>
+                            <a:srgbClr val="000000"/>
+                          </a:solidFill>
+                          <a:effectLst/>
+                          <a:latin typeface="微軟正黑體" panose="020B0604030504040204" pitchFamily="34" charset="-120"/>
+                          <a:ea typeface="微軟正黑體" panose="020B0604030504040204" pitchFamily="34" charset="-120"/>
+                        </a:rPr>
+                        <a:t>可行性高。系統已採前後端分離、背景任務佇列化、環境變數設定與容器化架構，適合部署於雲端容器平台或 </a:t>
+                      </a:r>
+                      <a:r>
+                        <a:rPr lang="en-US" altLang="zh-TW" sz="1000" b="0" i="0" u="none" strike="noStrike" dirty="0">
+                          <a:solidFill>
+                            <a:srgbClr val="000000"/>
+                          </a:solidFill>
+                          <a:effectLst/>
+                          <a:latin typeface="微軟正黑體" panose="020B0604030504040204" pitchFamily="34" charset="-120"/>
+                          <a:ea typeface="微軟正黑體" panose="020B0604030504040204" pitchFamily="34" charset="-120"/>
+                        </a:rPr>
+                        <a:t>Kubernetes</a:t>
+                      </a:r>
+                      <a:r>
+                        <a:rPr lang="zh-TW" altLang="en-US" sz="1000" b="0" i="0" u="none" strike="noStrike" dirty="0">
+                          <a:solidFill>
+                            <a:srgbClr val="000000"/>
+                          </a:solidFill>
+                          <a:effectLst/>
+                          <a:latin typeface="微軟正黑體" panose="020B0604030504040204" pitchFamily="34" charset="-120"/>
+                          <a:ea typeface="微軟正黑體" panose="020B0604030504040204" pitchFamily="34" charset="-120"/>
+                        </a:rPr>
+                        <a:t>。</a:t>
+                      </a:r>
                     </a:p>
                   </a:txBody>
                   <a:tcPr marL="4874" marR="4874" marT="4874" marB="0" anchor="ctr">
@@ -12034,7 +12308,216 @@
                     <a:lstStyle/>
                     <a:p>
                       <a:pPr algn="ctr" fontAlgn="ctr"/>
-                      <a:endParaRPr lang="en-US" altLang="zh-TW" sz="1000" b="1" i="0" u="none" strike="noStrike" dirty="0">
+                      <a:r>
+                        <a:rPr lang="zh-TW" altLang="en-US" sz="1000" b="0" i="0" u="none" strike="noStrike" dirty="0">
+                          <a:solidFill>
+                            <a:srgbClr val="000000"/>
+                          </a:solidFill>
+                          <a:effectLst/>
+                          <a:latin typeface="微軟正黑體" panose="020B0604030504040204" pitchFamily="34" charset="-120"/>
+                          <a:ea typeface="微軟正黑體" panose="020B0604030504040204" pitchFamily="34" charset="-120"/>
+                        </a:rPr>
+                        <a:t>目前已有地端 </a:t>
+                      </a:r>
+                      <a:r>
+                        <a:rPr lang="en-US" altLang="zh-TW" sz="1000" b="0" i="0" u="none" strike="noStrike" dirty="0">
+                          <a:solidFill>
+                            <a:srgbClr val="000000"/>
+                          </a:solidFill>
+                          <a:effectLst/>
+                          <a:latin typeface="微軟正黑體" panose="020B0604030504040204" pitchFamily="34" charset="-120"/>
+                          <a:ea typeface="微軟正黑體" panose="020B0604030504040204" pitchFamily="34" charset="-120"/>
+                        </a:rPr>
+                        <a:t>PoC </a:t>
+                      </a:r>
+                      <a:r>
+                        <a:rPr lang="zh-TW" altLang="en-US" sz="1000" b="0" i="0" u="none" strike="noStrike" dirty="0">
+                          <a:solidFill>
+                            <a:srgbClr val="000000"/>
+                          </a:solidFill>
+                          <a:effectLst/>
+                          <a:latin typeface="微軟正黑體" panose="020B0604030504040204" pitchFamily="34" charset="-120"/>
+                          <a:ea typeface="微軟正黑體" panose="020B0604030504040204" pitchFamily="34" charset="-120"/>
+                        </a:rPr>
+                        <a:t>環境，可以 </a:t>
+                      </a:r>
+                      <a:r>
+                        <a:rPr lang="en-US" altLang="zh-TW" sz="1000" b="0" i="0" u="none" strike="noStrike" dirty="0">
+                          <a:solidFill>
+                            <a:srgbClr val="000000"/>
+                          </a:solidFill>
+                          <a:effectLst/>
+                          <a:latin typeface="微軟正黑體" panose="020B0604030504040204" pitchFamily="34" charset="-120"/>
+                          <a:ea typeface="微軟正黑體" panose="020B0604030504040204" pitchFamily="34" charset="-120"/>
+                        </a:rPr>
+                        <a:t>PaaS</a:t>
+                      </a:r>
+                      <a:r>
+                        <a:rPr lang="zh-TW" altLang="en-US" sz="1000" b="0" i="0" u="none" strike="noStrike" dirty="0">
+                          <a:solidFill>
+                            <a:srgbClr val="000000"/>
+                          </a:solidFill>
+                          <a:effectLst/>
+                          <a:latin typeface="微軟正黑體" panose="020B0604030504040204" pitchFamily="34" charset="-120"/>
+                          <a:ea typeface="微軟正黑體" panose="020B0604030504040204" pitchFamily="34" charset="-120"/>
+                        </a:rPr>
+                        <a:t>／</a:t>
+                      </a:r>
+                      <a:r>
+                        <a:rPr lang="en-US" altLang="zh-TW" sz="1000" b="0" i="0" u="none" strike="noStrike" dirty="0">
+                          <a:solidFill>
+                            <a:srgbClr val="000000"/>
+                          </a:solidFill>
+                          <a:effectLst/>
+                          <a:latin typeface="微軟正黑體" panose="020B0604030504040204" pitchFamily="34" charset="-120"/>
+                          <a:ea typeface="微軟正黑體" panose="020B0604030504040204" pitchFamily="34" charset="-120"/>
+                        </a:rPr>
+                        <a:t>SaaS </a:t>
+                      </a:r>
+                      <a:r>
+                        <a:rPr lang="zh-TW" altLang="en-US" sz="1000" b="0" i="0" u="none" strike="noStrike" dirty="0">
+                          <a:solidFill>
+                            <a:srgbClr val="000000"/>
+                          </a:solidFill>
+                          <a:effectLst/>
+                          <a:latin typeface="微軟正黑體" panose="020B0604030504040204" pitchFamily="34" charset="-120"/>
+                          <a:ea typeface="微軟正黑體" panose="020B0604030504040204" pitchFamily="34" charset="-120"/>
+                        </a:rPr>
+                        <a:t>為主、 </a:t>
+                      </a:r>
+                      <a:r>
+                        <a:rPr lang="en-US" altLang="zh-TW" sz="1000" b="0" i="0" u="none" strike="noStrike" dirty="0">
+                          <a:solidFill>
+                            <a:srgbClr val="000000"/>
+                          </a:solidFill>
+                          <a:effectLst/>
+                          <a:latin typeface="微軟正黑體" panose="020B0604030504040204" pitchFamily="34" charset="-120"/>
+                          <a:ea typeface="微軟正黑體" panose="020B0604030504040204" pitchFamily="34" charset="-120"/>
+                        </a:rPr>
+                        <a:t>IaaS </a:t>
+                      </a:r>
+                      <a:r>
+                        <a:rPr lang="zh-TW" altLang="en-US" sz="1000" b="0" i="0" u="none" strike="noStrike" dirty="0">
+                          <a:solidFill>
+                            <a:srgbClr val="000000"/>
+                          </a:solidFill>
+                          <a:effectLst/>
+                          <a:latin typeface="微軟正黑體" panose="020B0604030504040204" pitchFamily="34" charset="-120"/>
+                          <a:ea typeface="微軟正黑體" panose="020B0604030504040204" pitchFamily="34" charset="-120"/>
+                        </a:rPr>
+                        <a:t>為輔進行雲端部署。評估範圍包含前端靜態部署、 </a:t>
+                      </a:r>
+                      <a:r>
+                        <a:rPr lang="en-US" altLang="zh-TW" sz="1000" b="0" i="0" u="none" strike="noStrike" dirty="0">
+                          <a:solidFill>
+                            <a:srgbClr val="000000"/>
+                          </a:solidFill>
+                          <a:effectLst/>
+                          <a:latin typeface="微軟正黑體" panose="020B0604030504040204" pitchFamily="34" charset="-120"/>
+                          <a:ea typeface="微軟正黑體" panose="020B0604030504040204" pitchFamily="34" charset="-120"/>
+                        </a:rPr>
+                        <a:t>API </a:t>
+                      </a:r>
+                      <a:r>
+                        <a:rPr lang="zh-TW" altLang="en-US" sz="1000" b="0" i="0" u="none" strike="noStrike" dirty="0">
+                          <a:solidFill>
+                            <a:srgbClr val="000000"/>
+                          </a:solidFill>
+                          <a:effectLst/>
+                          <a:latin typeface="微軟正黑體" panose="020B0604030504040204" pitchFamily="34" charset="-120"/>
+                          <a:ea typeface="微軟正黑體" panose="020B0604030504040204" pitchFamily="34" charset="-120"/>
+                        </a:rPr>
+                        <a:t>容器化、 </a:t>
+                      </a:r>
+                      <a:r>
+                        <a:rPr lang="en-US" altLang="zh-TW" sz="1000" b="0" i="0" u="none" strike="noStrike" dirty="0">
+                          <a:solidFill>
+                            <a:srgbClr val="000000"/>
+                          </a:solidFill>
+                          <a:effectLst/>
+                          <a:latin typeface="微軟正黑體" panose="020B0604030504040204" pitchFamily="34" charset="-120"/>
+                          <a:ea typeface="微軟正黑體" panose="020B0604030504040204" pitchFamily="34" charset="-120"/>
+                        </a:rPr>
+                        <a:t>MongoDB </a:t>
+                      </a:r>
+                      <a:r>
+                        <a:rPr lang="zh-TW" altLang="en-US" sz="1000" b="0" i="0" u="none" strike="noStrike" dirty="0">
+                          <a:solidFill>
+                            <a:srgbClr val="000000"/>
+                          </a:solidFill>
+                          <a:effectLst/>
+                          <a:latin typeface="微軟正黑體" panose="020B0604030504040204" pitchFamily="34" charset="-120"/>
+                          <a:ea typeface="微軟正黑體" panose="020B0604030504040204" pitchFamily="34" charset="-120"/>
+                        </a:rPr>
+                        <a:t>與 </a:t>
+                      </a:r>
+                      <a:r>
+                        <a:rPr lang="en-US" altLang="zh-TW" sz="1000" b="0" i="0" u="none" strike="noStrike" dirty="0">
+                          <a:solidFill>
+                            <a:srgbClr val="000000"/>
+                          </a:solidFill>
+                          <a:effectLst/>
+                          <a:latin typeface="微軟正黑體" panose="020B0604030504040204" pitchFamily="34" charset="-120"/>
+                          <a:ea typeface="微軟正黑體" panose="020B0604030504040204" pitchFamily="34" charset="-120"/>
+                        </a:rPr>
+                        <a:t>Redis </a:t>
+                      </a:r>
+                      <a:r>
+                        <a:rPr lang="zh-TW" altLang="en-US" sz="1000" b="0" i="0" u="none" strike="noStrike" dirty="0">
+                          <a:solidFill>
+                            <a:srgbClr val="000000"/>
+                          </a:solidFill>
+                          <a:effectLst/>
+                          <a:latin typeface="微軟正黑體" panose="020B0604030504040204" pitchFamily="34" charset="-120"/>
+                          <a:ea typeface="微軟正黑體" panose="020B0604030504040204" pitchFamily="34" charset="-120"/>
+                        </a:rPr>
+                        <a:t>代管、背景任務排程、外部 </a:t>
+                      </a:r>
+                      <a:r>
+                        <a:rPr lang="en-US" altLang="zh-TW" sz="1000" b="0" i="0" u="none" strike="noStrike" dirty="0">
+                          <a:solidFill>
+                            <a:srgbClr val="000000"/>
+                          </a:solidFill>
+                          <a:effectLst/>
+                          <a:latin typeface="微軟正黑體" panose="020B0604030504040204" pitchFamily="34" charset="-120"/>
+                          <a:ea typeface="微軟正黑體" panose="020B0604030504040204" pitchFamily="34" charset="-120"/>
+                        </a:rPr>
+                        <a:t>API </a:t>
+                      </a:r>
+                      <a:r>
+                        <a:rPr lang="zh-TW" altLang="en-US" sz="1000" b="0" i="0" u="none" strike="noStrike" dirty="0">
+                          <a:solidFill>
+                            <a:srgbClr val="000000"/>
+                          </a:solidFill>
+                          <a:effectLst/>
+                          <a:latin typeface="微軟正黑體" panose="020B0604030504040204" pitchFamily="34" charset="-120"/>
+                          <a:ea typeface="微軟正黑體" panose="020B0604030504040204" pitchFamily="34" charset="-120"/>
+                        </a:rPr>
+                        <a:t>串接、 </a:t>
+                      </a:r>
+                      <a:r>
+                        <a:rPr lang="en-US" altLang="zh-TW" sz="1000" b="0" i="0" u="none" strike="noStrike" dirty="0">
+                          <a:solidFill>
+                            <a:srgbClr val="000000"/>
+                          </a:solidFill>
+                          <a:effectLst/>
+                          <a:latin typeface="微軟正黑體" panose="020B0604030504040204" pitchFamily="34" charset="-120"/>
+                          <a:ea typeface="微軟正黑體" panose="020B0604030504040204" pitchFamily="34" charset="-120"/>
+                        </a:rPr>
+                        <a:t>Secret </a:t>
+                      </a:r>
+                      <a:r>
+                        <a:rPr lang="zh-TW" altLang="en-US" sz="1000" b="0" i="0" u="none" strike="noStrike" dirty="0">
+                          <a:solidFill>
+                            <a:srgbClr val="000000"/>
+                          </a:solidFill>
+                          <a:effectLst/>
+                          <a:latin typeface="微軟正黑體" panose="020B0604030504040204" pitchFamily="34" charset="-120"/>
+                          <a:ea typeface="微軟正黑體" panose="020B0604030504040204" pitchFamily="34" charset="-120"/>
+                        </a:rPr>
+                        <a:t>管理、監控告警、備份與復原。</a:t>
+                      </a:r>
+                      <a:endParaRPr lang="en-US" altLang="zh-TW" sz="1000" b="0" i="0" u="none" strike="noStrike" dirty="0">
                         <a:solidFill>
                           <a:srgbClr val="000000"/>
                         </a:solidFill>
@@ -12045,51 +12528,7 @@
                     </a:p>
                     <a:p>
                       <a:pPr algn="ctr" fontAlgn="ctr"/>
-                      <a:endParaRPr lang="en-US" altLang="zh-TW" sz="1000" b="1" i="0" u="none" strike="noStrike" dirty="0">
-                        <a:solidFill>
-                          <a:srgbClr val="000000"/>
-                        </a:solidFill>
-                        <a:effectLst/>
-                        <a:latin typeface="微軟正黑體" panose="020B0604030504040204" pitchFamily="34" charset="-120"/>
-                        <a:ea typeface="微軟正黑體" panose="020B0604030504040204" pitchFamily="34" charset="-120"/>
-                      </a:endParaRPr>
-                    </a:p>
-                    <a:p>
-                      <a:pPr algn="ctr" fontAlgn="ctr"/>
-                      <a:endParaRPr lang="en-US" altLang="zh-TW" sz="1000" b="1" i="0" u="none" strike="noStrike" dirty="0">
-                        <a:solidFill>
-                          <a:srgbClr val="000000"/>
-                        </a:solidFill>
-                        <a:effectLst/>
-                        <a:latin typeface="微軟正黑體" panose="020B0604030504040204" pitchFamily="34" charset="-120"/>
-                        <a:ea typeface="微軟正黑體" panose="020B0604030504040204" pitchFamily="34" charset="-120"/>
-                      </a:endParaRPr>
-                    </a:p>
-                    <a:p>
-                      <a:pPr algn="ctr" fontAlgn="ctr"/>
-                      <a:endParaRPr lang="en-US" altLang="zh-TW" sz="1000" b="1" i="0" u="none" strike="noStrike" dirty="0">
-                        <a:solidFill>
-                          <a:srgbClr val="000000"/>
-                        </a:solidFill>
-                        <a:effectLst/>
-                        <a:latin typeface="微軟正黑體" panose="020B0604030504040204" pitchFamily="34" charset="-120"/>
-                        <a:ea typeface="微軟正黑體" panose="020B0604030504040204" pitchFamily="34" charset="-120"/>
-                      </a:endParaRPr>
-                    </a:p>
-                    <a:p>
-                      <a:pPr algn="ctr" fontAlgn="ctr"/>
-                      <a:endParaRPr lang="en-US" altLang="zh-TW" sz="1000" b="1" i="0" u="none" strike="noStrike" dirty="0">
-                        <a:solidFill>
-                          <a:srgbClr val="000000"/>
-                        </a:solidFill>
-                        <a:effectLst/>
-                        <a:latin typeface="微軟正黑體" panose="020B0604030504040204" pitchFamily="34" charset="-120"/>
-                        <a:ea typeface="微軟正黑體" panose="020B0604030504040204" pitchFamily="34" charset="-120"/>
-                      </a:endParaRPr>
-                    </a:p>
-                    <a:p>
-                      <a:pPr algn="ctr" fontAlgn="ctr"/>
-                      <a:endParaRPr lang="zh-TW" altLang="en-US" sz="1000" b="1" i="0" u="none" strike="noStrike" dirty="0">
+                      <a:endParaRPr lang="zh-TW" altLang="en-US" sz="1000" b="0" i="0" u="none" strike="noStrike" dirty="0">
                         <a:solidFill>
                           <a:srgbClr val="000000"/>
                         </a:solidFill>
@@ -12147,7 +12586,40 @@
                     <a:lstStyle/>
                     <a:p>
                       <a:pPr algn="ctr" fontAlgn="ctr"/>
-                      <a:endParaRPr lang="en-US" altLang="zh-TW" sz="1000" b="1" i="0" u="none" strike="noStrike" dirty="0">
+                      <a:r>
+                        <a:rPr lang="zh-TW" altLang="en-US" sz="1000" b="0" i="0" u="none" strike="noStrike" dirty="0">
+                          <a:solidFill>
+                            <a:srgbClr val="000000"/>
+                          </a:solidFill>
+                          <a:effectLst/>
+                          <a:latin typeface="微軟正黑體" panose="020B0604030504040204" pitchFamily="34" charset="-120"/>
+                          <a:ea typeface="微軟正黑體" panose="020B0604030504040204" pitchFamily="34" charset="-120"/>
+                        </a:rPr>
+                        <a:t>可提升部署效率、系統擴充性、服務可用性與維運穩定度，並降低基礎設施管理負擔。對資料擷取、 </a:t>
+                      </a:r>
+                      <a:r>
+                        <a:rPr lang="en-US" altLang="zh-TW" sz="1000" b="0" i="0" u="none" strike="noStrike" dirty="0">
+                          <a:solidFill>
+                            <a:srgbClr val="000000"/>
+                          </a:solidFill>
+                          <a:effectLst/>
+                          <a:latin typeface="微軟正黑體" panose="020B0604030504040204" pitchFamily="34" charset="-120"/>
+                          <a:ea typeface="微軟正黑體" panose="020B0604030504040204" pitchFamily="34" charset="-120"/>
+                        </a:rPr>
+                        <a:t>LLM </a:t>
+                      </a:r>
+                      <a:r>
+                        <a:rPr lang="zh-TW" altLang="en-US" sz="1000" b="0" i="0" u="none" strike="noStrike" dirty="0">
+                          <a:solidFill>
+                            <a:srgbClr val="000000"/>
+                          </a:solidFill>
+                          <a:effectLst/>
+                          <a:latin typeface="微軟正黑體" panose="020B0604030504040204" pitchFamily="34" charset="-120"/>
+                          <a:ea typeface="微軟正黑體" panose="020B0604030504040204" pitchFamily="34" charset="-120"/>
+                        </a:rPr>
+                        <a:t>分析與排程任務，可依負載彈性擴充資源。</a:t>
+                      </a:r>
+                      <a:endParaRPr lang="en-US" altLang="zh-TW" sz="1000" b="0" i="0" u="none" strike="noStrike" dirty="0">
                         <a:solidFill>
                           <a:srgbClr val="000000"/>
                         </a:solidFill>
@@ -12205,14 +12677,61 @@
                     <a:lstStyle/>
                     <a:p>
                       <a:pPr algn="ctr" fontAlgn="ctr"/>
-                      <a:endParaRPr lang="zh-TW" altLang="en-US" sz="1000" b="1" i="0" u="none" strike="noStrike" dirty="0">
-                        <a:solidFill>
-                          <a:srgbClr val="000000"/>
-                        </a:solidFill>
-                        <a:effectLst/>
-                        <a:latin typeface="微軟正黑體" panose="020B0604030504040204" pitchFamily="34" charset="-120"/>
-                        <a:ea typeface="微軟正黑體" panose="020B0604030504040204" pitchFamily="34" charset="-120"/>
-                      </a:endParaRPr>
+                      <a:r>
+                        <a:rPr lang="zh-TW" altLang="en-US" sz="1000" b="0" i="0" u="none" strike="noStrike" dirty="0">
+                          <a:solidFill>
+                            <a:srgbClr val="000000"/>
+                          </a:solidFill>
+                          <a:effectLst/>
+                          <a:latin typeface="微軟正黑體" panose="020B0604030504040204" pitchFamily="34" charset="-120"/>
+                          <a:ea typeface="微軟正黑體" panose="020B0604030504040204" pitchFamily="34" charset="-120"/>
+                        </a:rPr>
+                        <a:t>若目前僅為低流量內部 </a:t>
+                      </a:r>
+                      <a:r>
+                        <a:rPr lang="en-US" altLang="zh-TW" sz="1000" b="0" i="0" u="none" strike="noStrike" dirty="0">
+                          <a:solidFill>
+                            <a:srgbClr val="000000"/>
+                          </a:solidFill>
+                          <a:effectLst/>
+                          <a:latin typeface="微軟正黑體" panose="020B0604030504040204" pitchFamily="34" charset="-120"/>
+                          <a:ea typeface="微軟正黑體" panose="020B0604030504040204" pitchFamily="34" charset="-120"/>
+                        </a:rPr>
+                        <a:t>PoC</a:t>
+                      </a:r>
+                      <a:r>
+                        <a:rPr lang="zh-TW" altLang="en-US" sz="1000" b="0" i="0" u="none" strike="noStrike" dirty="0">
+                          <a:solidFill>
+                            <a:srgbClr val="000000"/>
+                          </a:solidFill>
+                          <a:effectLst/>
+                          <a:latin typeface="微軟正黑體" panose="020B0604030504040204" pitchFamily="34" charset="-120"/>
+                          <a:ea typeface="微軟正黑體" panose="020B0604030504040204" pitchFamily="34" charset="-120"/>
+                        </a:rPr>
+                        <a:t>，上雲短期效益有限，可能增加雲端成本與維運複雜度；外部資料來源限制與 </a:t>
+                      </a:r>
+                      <a:r>
+                        <a:rPr lang="en-US" altLang="zh-TW" sz="1000" b="0" i="0" u="none" strike="noStrike" dirty="0">
+                          <a:solidFill>
+                            <a:srgbClr val="000000"/>
+                          </a:solidFill>
+                          <a:effectLst/>
+                          <a:latin typeface="微軟正黑體" panose="020B0604030504040204" pitchFamily="34" charset="-120"/>
+                          <a:ea typeface="微軟正黑體" panose="020B0604030504040204" pitchFamily="34" charset="-120"/>
+                        </a:rPr>
+                        <a:t>API </a:t>
+                      </a:r>
+                      <a:r>
+                        <a:rPr lang="zh-TW" altLang="en-US" sz="1000" b="0" i="0" u="none" strike="noStrike" dirty="0">
+                          <a:solidFill>
+                            <a:srgbClr val="000000"/>
+                          </a:solidFill>
+                          <a:effectLst/>
+                          <a:latin typeface="微軟正黑體" panose="020B0604030504040204" pitchFamily="34" charset="-120"/>
+                          <a:ea typeface="微軟正黑體" panose="020B0604030504040204" pitchFamily="34" charset="-120"/>
+                        </a:rPr>
+                        <a:t>額度問題也無法單靠上雲完全解決。</a:t>
+                      </a:r>
                     </a:p>
                   </a:txBody>
                   <a:tcPr marL="4874" marR="4874" marT="4874" marB="0" anchor="ctr">
@@ -12263,14 +12782,94 @@
                     <a:lstStyle/>
                     <a:p>
                       <a:pPr algn="ctr" fontAlgn="ctr"/>
-                      <a:endParaRPr lang="zh-TW" altLang="en-US" sz="1000" b="1" i="0" u="none" strike="noStrike" dirty="0">
-                        <a:solidFill>
-                          <a:srgbClr val="000000"/>
-                        </a:solidFill>
-                        <a:effectLst/>
-                        <a:latin typeface="微軟正黑體" panose="020B0604030504040204" pitchFamily="34" charset="-120"/>
-                        <a:ea typeface="微軟正黑體" panose="020B0604030504040204" pitchFamily="34" charset="-120"/>
-                      </a:endParaRPr>
+                      <a:r>
+                        <a:rPr lang="zh-TW" altLang="en-US" sz="1000" b="0" i="0" u="none" strike="noStrike" dirty="0">
+                          <a:solidFill>
+                            <a:srgbClr val="000000"/>
+                          </a:solidFill>
+                          <a:effectLst/>
+                          <a:latin typeface="微軟正黑體" panose="020B0604030504040204" pitchFamily="34" charset="-120"/>
+                          <a:ea typeface="微軟正黑體" panose="020B0604030504040204" pitchFamily="34" charset="-120"/>
+                        </a:rPr>
+                        <a:t>主要障礙為資料遷移、佇列任務不中斷切換、</a:t>
+                      </a:r>
+                      <a:r>
+                        <a:rPr lang="en-US" altLang="zh-TW" sz="1000" b="0" i="0" u="none" strike="noStrike" dirty="0">
+                          <a:solidFill>
+                            <a:srgbClr val="000000"/>
+                          </a:solidFill>
+                          <a:effectLst/>
+                          <a:latin typeface="微軟正黑體" panose="020B0604030504040204" pitchFamily="34" charset="-120"/>
+                          <a:ea typeface="微軟正黑體" panose="020B0604030504040204" pitchFamily="34" charset="-120"/>
+                        </a:rPr>
+                        <a:t>MongoDB</a:t>
+                      </a:r>
+                      <a:r>
+                        <a:rPr lang="zh-TW" altLang="en-US" sz="1000" b="0" i="0" u="none" strike="noStrike" dirty="0">
+                          <a:solidFill>
+                            <a:srgbClr val="000000"/>
+                          </a:solidFill>
+                          <a:effectLst/>
+                          <a:latin typeface="微軟正黑體" panose="020B0604030504040204" pitchFamily="34" charset="-120"/>
+                          <a:ea typeface="微軟正黑體" panose="020B0604030504040204" pitchFamily="34" charset="-120"/>
+                        </a:rPr>
+                        <a:t>、</a:t>
+                      </a:r>
+                      <a:r>
+                        <a:rPr lang="en-US" altLang="zh-TW" sz="1000" b="0" i="0" u="none" strike="noStrike" dirty="0">
+                          <a:solidFill>
+                            <a:srgbClr val="000000"/>
+                          </a:solidFill>
+                          <a:effectLst/>
+                          <a:latin typeface="微軟正黑體" panose="020B0604030504040204" pitchFamily="34" charset="-120"/>
+                          <a:ea typeface="微軟正黑體" panose="020B0604030504040204" pitchFamily="34" charset="-120"/>
+                        </a:rPr>
+                        <a:t>Redis</a:t>
+                      </a:r>
+                      <a:r>
+                        <a:rPr lang="zh-TW" altLang="en-US" sz="1000" b="0" i="0" u="none" strike="noStrike" dirty="0">
+                          <a:solidFill>
+                            <a:srgbClr val="000000"/>
+                          </a:solidFill>
+                          <a:effectLst/>
+                          <a:latin typeface="微軟正黑體" panose="020B0604030504040204" pitchFamily="34" charset="-120"/>
+                          <a:ea typeface="微軟正黑體" panose="020B0604030504040204" pitchFamily="34" charset="-120"/>
+                        </a:rPr>
+                        <a:t>／</a:t>
+                      </a:r>
+                      <a:r>
+                        <a:rPr lang="en-US" altLang="zh-TW" sz="1000" b="0" i="0" u="none" strike="noStrike" dirty="0" err="1">
+                          <a:solidFill>
+                            <a:srgbClr val="000000"/>
+                          </a:solidFill>
+                          <a:effectLst/>
+                          <a:latin typeface="微軟正黑體" panose="020B0604030504040204" pitchFamily="34" charset="-120"/>
+                          <a:ea typeface="微軟正黑體" panose="020B0604030504040204" pitchFamily="34" charset="-120"/>
+                        </a:rPr>
+                        <a:t>BullMQ</a:t>
+                      </a:r>
+                      <a:r>
+                        <a:rPr lang="en-US" altLang="zh-TW" sz="1000" b="0" i="0" u="none" strike="noStrike" dirty="0">
+                          <a:solidFill>
+                            <a:srgbClr val="000000"/>
+                          </a:solidFill>
+                          <a:effectLst/>
+                          <a:latin typeface="微軟正黑體" panose="020B0604030504040204" pitchFamily="34" charset="-120"/>
+                          <a:ea typeface="微軟正黑體" panose="020B0604030504040204" pitchFamily="34" charset="-120"/>
+                        </a:rPr>
+                        <a:t> </a:t>
+                      </a:r>
+                      <a:r>
+                        <a:rPr lang="zh-TW" altLang="en-US" sz="1000" b="0" i="0" u="none" strike="noStrike" dirty="0">
+                          <a:solidFill>
+                            <a:srgbClr val="000000"/>
+                          </a:solidFill>
+                          <a:effectLst/>
+                          <a:latin typeface="微軟正黑體" panose="020B0604030504040204" pitchFamily="34" charset="-120"/>
+                          <a:ea typeface="微軟正黑體" panose="020B0604030504040204" pitchFamily="34" charset="-120"/>
+                        </a:rPr>
+                        <a:t>可靠性、外部服務網路設定、以及資安、稽核與成本控管要求。</a:t>
+                      </a:r>
                     </a:p>
                   </a:txBody>
                   <a:tcPr marL="4874" marR="4874" marT="4874" marB="0" anchor="ctr">
@@ -20120,6 +20719,25 @@
 </file>
 
 <file path=customXml/item2.xml><?xml version="1.0" encoding="utf-8"?>
+<p:properties xmlns:p="http://schemas.microsoft.com/office/2006/metadata/properties" xmlns:xsi="http://www.w3.org/2001/XMLSchema-instance" xmlns:pc="http://schemas.microsoft.com/office/infopath/2007/PartnerControls">
+  <documentManagement>
+    <lcf76f155ced4ddcb4097134ff3c332f xmlns="8c347b5b-664f-4082-9567-437cbd15a340">
+      <Terms xmlns="http://schemas.microsoft.com/office/infopath/2007/PartnerControls"/>
+    </lcf76f155ced4ddcb4097134ff3c332f>
+  </documentManagement>
+</p:properties>
+</file>
+
+<file path=customXml/item3.xml><?xml version="1.0" encoding="utf-8"?>
+<?mso-contentType ?>
+<FormTemplates xmlns="http://schemas.microsoft.com/sharepoint/v3/contenttype/forms">
+  <Display>DocumentLibraryForm</Display>
+  <Edit>DocumentLibraryForm</Edit>
+  <New>DocumentLibraryForm</New>
+</FormTemplates>
+</file>
+
+<file path=customXml/item4.xml><?xml version="1.0" encoding="utf-8"?>
 <ct:contentTypeSchema xmlns:ct="http://schemas.microsoft.com/office/2006/metadata/contentType" xmlns:ma="http://schemas.microsoft.com/office/2006/metadata/properties/metaAttributes" ct:_="" ma:_="" ma:contentTypeName="Document" ma:contentTypeID="0x0101003259A0A14F75594CB856133A4244302C" ma:contentTypeVersion="13" ma:contentTypeDescription="Create a new document." ma:contentTypeScope="" ma:versionID="4a139e51f21a2c58b54a675920ff902e">
   <xsd:schema xmlns:xsd="http://www.w3.org/2001/XMLSchema" xmlns:xs="http://www.w3.org/2001/XMLSchema" xmlns:p="http://schemas.microsoft.com/office/2006/metadata/properties" xmlns:ns2="8c347b5b-664f-4082-9567-437cbd15a340" targetNamespace="http://schemas.microsoft.com/office/2006/metadata/properties" ma:root="true" ma:fieldsID="a60018fa8a2fa0c535839dd344c1f3e9" ns2:_="">
     <xsd:import namespace="8c347b5b-664f-4082-9567-437cbd15a340"/>
@@ -20315,25 +20933,6 @@
 </ct:contentTypeSchema>
 </file>
 
-<file path=customXml/item3.xml><?xml version="1.0" encoding="utf-8"?>
-<?mso-contentType ?>
-<FormTemplates xmlns="http://schemas.microsoft.com/sharepoint/v3/contenttype/forms">
-  <Display>DocumentLibraryForm</Display>
-  <Edit>DocumentLibraryForm</Edit>
-  <New>DocumentLibraryForm</New>
-</FormTemplates>
-</file>
-
-<file path=customXml/item4.xml><?xml version="1.0" encoding="utf-8"?>
-<p:properties xmlns:p="http://schemas.microsoft.com/office/2006/metadata/properties" xmlns:xsi="http://www.w3.org/2001/XMLSchema-instance" xmlns:pc="http://schemas.microsoft.com/office/infopath/2007/PartnerControls">
-  <documentManagement>
-    <lcf76f155ced4ddcb4097134ff3c332f xmlns="8c347b5b-664f-4082-9567-437cbd15a340">
-      <Terms xmlns="http://schemas.microsoft.com/office/infopath/2007/PartnerControls"/>
-    </lcf76f155ced4ddcb4097134ff3c332f>
-  </documentManagement>
-</p:properties>
-</file>
-
 <file path=customXml/itemProps1.xml><?xml version="1.0" encoding="utf-8"?>
 <ds:datastoreItem xmlns:ds="http://schemas.openxmlformats.org/officeDocument/2006/customXml" ds:itemID="{0968E92D-B120-46A6-B346-7A2277B7CA2A}">
   <ds:schemaRefs>
@@ -20343,13 +20942,37 @@
 </file>
 
 <file path=customXml/itemProps2.xml><?xml version="1.0" encoding="utf-8"?>
-<ds:datastoreItem xmlns:ds="http://schemas.openxmlformats.org/officeDocument/2006/customXml" ds:itemID="{156918D3-7876-4C41-AC53-789A8B70749A}"/>
+<ds:datastoreItem xmlns:ds="http://schemas.openxmlformats.org/officeDocument/2006/customXml" ds:itemID="{7543D6DB-B158-481F-9CC6-968B17397F0C}">
+  <ds:schemaRefs>
+    <ds:schemaRef ds:uri="http://schemas.microsoft.com/office/2006/metadata/properties"/>
+    <ds:schemaRef ds:uri="http://schemas.microsoft.com/office/infopath/2007/PartnerControls"/>
+    <ds:schemaRef ds:uri="8c347b5b-664f-4082-9567-437cbd15a340"/>
+  </ds:schemaRefs>
+</ds:datastoreItem>
 </file>
 
 <file path=customXml/itemProps3.xml><?xml version="1.0" encoding="utf-8"?>
-<ds:datastoreItem xmlns:ds="http://schemas.openxmlformats.org/officeDocument/2006/customXml" ds:itemID="{7BC7408B-D18B-48AC-9D8E-3F169F74A11F}"/>
+<ds:datastoreItem xmlns:ds="http://schemas.openxmlformats.org/officeDocument/2006/customXml" ds:itemID="{7BC7408B-D18B-48AC-9D8E-3F169F74A11F}">
+  <ds:schemaRefs>
+    <ds:schemaRef ds:uri="http://schemas.microsoft.com/sharepoint/v3/contenttype/forms"/>
+  </ds:schemaRefs>
+</ds:datastoreItem>
 </file>
 
 <file path=customXml/itemProps4.xml><?xml version="1.0" encoding="utf-8"?>
-<ds:datastoreItem xmlns:ds="http://schemas.openxmlformats.org/officeDocument/2006/customXml" ds:itemID="{7543D6DB-B158-481F-9CC6-968B17397F0C}"/>
+<ds:datastoreItem xmlns:ds="http://schemas.openxmlformats.org/officeDocument/2006/customXml" ds:itemID="{156918D3-7876-4C41-AC53-789A8B70749A}">
+  <ds:schemaRefs>
+    <ds:schemaRef ds:uri="http://schemas.microsoft.com/office/2006/metadata/contentType"/>
+    <ds:schemaRef ds:uri="http://schemas.microsoft.com/office/2006/metadata/properties/metaAttributes"/>
+    <ds:schemaRef ds:uri="http://www.w3.org/2001/XMLSchema"/>
+    <ds:schemaRef ds:uri="http://schemas.microsoft.com/office/2006/metadata/properties"/>
+    <ds:schemaRef ds:uri="8c347b5b-664f-4082-9567-437cbd15a340"/>
+    <ds:schemaRef ds:uri="http://schemas.microsoft.com/office/2006/documentManagement/types"/>
+    <ds:schemaRef ds:uri="http://schemas.microsoft.com/office/infopath/2007/PartnerControls"/>
+    <ds:schemaRef ds:uri="http://schemas.openxmlformats.org/package/2006/metadata/core-properties"/>
+    <ds:schemaRef ds:uri="http://purl.org/dc/elements/1.1/"/>
+    <ds:schemaRef ds:uri="http://purl.org/dc/terms/"/>
+    <ds:schemaRef ds:uri="http://schemas.microsoft.com/internal/obd"/>
+  </ds:schemaRefs>
+</ds:datastoreItem>
 </file>